--- a/presentaion1.pptx
+++ b/presentaion1.pptx
@@ -5354,7 +5354,7 @@
     <a:masterClrMapping/>
   </p:clrMapOvr>
   <mc:AlternateContent xmlns:mc="http://schemas.openxmlformats.org/markup-compatibility/2006">
-    <mc:Choice xmlns="" xmlns:p14="http://schemas.microsoft.com/office/powerpoint/2010/main" xmlns:p15="http://schemas.microsoft.com/office/powerpoint/2012/main" Requires="p14">
+    <mc:Choice xmlns:p15="http://schemas.microsoft.com/office/powerpoint/2012/main" xmlns:p14="http://schemas.microsoft.com/office/powerpoint/2010/main" xmlns="" Requires="p14">
       <p:transition spd="slow" p14:dur="2000"/>
     </mc:Choice>
     <mc:Fallback>
@@ -5545,132 +5545,11 @@
   <p:clrMapOvr>
     <a:masterClrMapping/>
   </p:clrMapOvr>
-  <mc:AlternateContent xmlns:mc="http://schemas.openxmlformats.org/markup-compatibility/2006">
-    <mc:Choice xmlns="" xmlns:p14="http://schemas.microsoft.com/office/powerpoint/2010/main" xmlns:p15="http://schemas.microsoft.com/office/powerpoint/2012/main" Requires="p14">
-      <p:transition spd="slow" p14:dur="2000"/>
-    </mc:Choice>
-    <mc:Fallback>
-      <p:transition spd="slow"/>
-    </mc:Fallback>
-  </mc:AlternateContent>
+  <p:transition spd="slow" advClick="0"/>
   <p:timing>
     <p:tnLst>
       <p:par>
-        <p:cTn id="1" dur="indefinite" restart="never" nodeType="tmRoot">
-          <p:childTnLst>
-            <p:seq>
-              <p:cTn id="2" dur="indefinite" nodeType="mainSeq">
-                <p:childTnLst>
-                  <p:par>
-                    <p:cTn id="3" fill="hold">
-                      <p:stCondLst>
-                        <p:cond delay="indefinite"/>
-                      </p:stCondLst>
-                      <p:childTnLst>
-                        <p:par>
-                          <p:cTn id="4" fill="hold">
-                            <p:stCondLst>
-                              <p:cond delay="0"/>
-                            </p:stCondLst>
-                            <p:childTnLst>
-                              <p:par>
-                                <p:cTn id="5" presetID="2" presetClass="entr" presetSubtype="4" fill="hold" nodeType="clickEffect">
-                                  <p:stCondLst>
-                                    <p:cond delay="0"/>
-                                  </p:stCondLst>
-                                  <p:childTnLst>
-                                    <p:set>
-                                      <p:cBhvr>
-                                        <p:cTn id="6" dur="1" fill="hold">
-                                          <p:stCondLst>
-                                            <p:cond delay="0"/>
-                                          </p:stCondLst>
-                                        </p:cTn>
-                                        <p:tgtEl>
-                                          <p:spTgt spid="102"/>
-                                        </p:tgtEl>
-                                        <p:attrNameLst>
-                                          <p:attrName>style.visibility</p:attrName>
-                                        </p:attrNameLst>
-                                      </p:cBhvr>
-                                      <p:to>
-                                        <p:strVal val="visible"/>
-                                      </p:to>
-                                    </p:set>
-                                    <p:anim calcmode="lin" valueType="num">
-                                      <p:cBhvr additive="repl">
-                                        <p:cTn id="7" dur="500" fill="hold"/>
-                                        <p:tgtEl>
-                                          <p:spTgt spid="102"/>
-                                        </p:tgtEl>
-                                        <p:attrNameLst>
-                                          <p:attrName>ppt_x</p:attrName>
-                                        </p:attrNameLst>
-                                      </p:cBhvr>
-                                      <p:tavLst>
-                                        <p:tav tm="0">
-                                          <p:val>
-                                            <p:strVal val="#ppt_x"/>
-                                          </p:val>
-                                        </p:tav>
-                                        <p:tav tm="100000">
-                                          <p:val>
-                                            <p:strVal val="#ppt_x"/>
-                                          </p:val>
-                                        </p:tav>
-                                      </p:tavLst>
-                                    </p:anim>
-                                    <p:anim calcmode="lin" valueType="num">
-                                      <p:cBhvr additive="repl">
-                                        <p:cTn id="8" dur="500" fill="hold"/>
-                                        <p:tgtEl>
-                                          <p:spTgt spid="102"/>
-                                        </p:tgtEl>
-                                        <p:attrNameLst>
-                                          <p:attrName>ppt_y</p:attrName>
-                                        </p:attrNameLst>
-                                      </p:cBhvr>
-                                      <p:tavLst>
-                                        <p:tav tm="0">
-                                          <p:val>
-                                            <p:strVal val="1+#ppt_h/2"/>
-                                          </p:val>
-                                        </p:tav>
-                                        <p:tav tm="100000">
-                                          <p:val>
-                                            <p:strVal val="#ppt_y"/>
-                                          </p:val>
-                                        </p:tav>
-                                      </p:tavLst>
-                                    </p:anim>
-                                  </p:childTnLst>
-                                </p:cTn>
-                              </p:par>
-                            </p:childTnLst>
-                          </p:cTn>
-                        </p:par>
-                      </p:childTnLst>
-                    </p:cTn>
-                  </p:par>
-                </p:childTnLst>
-              </p:cTn>
-              <p:prevCondLst>
-                <p:cond evt="onPrev" delay="0">
-                  <p:tgtEl>
-                    <p:sldTgt/>
-                  </p:tgtEl>
-                </p:cond>
-              </p:prevCondLst>
-              <p:nextCondLst>
-                <p:cond evt="onNext" delay="0">
-                  <p:tgtEl>
-                    <p:sldTgt/>
-                  </p:tgtEl>
-                </p:cond>
-              </p:nextCondLst>
-            </p:seq>
-          </p:childTnLst>
-        </p:cTn>
+        <p:cTn id="1" dur="indefinite" restart="never" nodeType="tmRoot"/>
       </p:par>
     </p:tnLst>
   </p:timing>
@@ -5800,13 +5679,7 @@
               <a:rPr lang="ru-RU" dirty="0" smtClean="0">
                 <a:latin typeface="Source Sans Pro"/>
               </a:rPr>
-              <a:t>/</a:t>
-            </a:r>
-            <a:r>
-              <a:rPr lang="ru-RU" dirty="0" smtClean="0">
-                <a:latin typeface="Source Sans Pro"/>
-              </a:rPr>
-              <a:t>9</a:t>
+              <a:t>/9</a:t>
             </a:r>
             <a:endParaRPr lang="en-US" sz="1800" b="0" u="none" strike="noStrike" dirty="0">
               <a:effectLst/>
@@ -6107,7 +5980,7 @@
     <a:masterClrMapping/>
   </p:clrMapOvr>
   <mc:AlternateContent xmlns:mc="http://schemas.openxmlformats.org/markup-compatibility/2006">
-    <mc:Choice xmlns="" xmlns:p14="http://schemas.microsoft.com/office/powerpoint/2010/main" xmlns:p15="http://schemas.microsoft.com/office/powerpoint/2012/main" Requires="p14">
+    <mc:Choice xmlns:p15="http://schemas.microsoft.com/office/powerpoint/2012/main" xmlns:p14="http://schemas.microsoft.com/office/powerpoint/2010/main" xmlns="" Requires="p14">
       <p:transition spd="slow" p14:dur="2000"/>
     </mc:Choice>
     <mc:Fallback>
@@ -6561,7 +6434,7 @@
     <a:masterClrMapping/>
   </p:clrMapOvr>
   <mc:AlternateContent xmlns:mc="http://schemas.openxmlformats.org/markup-compatibility/2006">
-    <mc:Choice xmlns="" xmlns:p14="http://schemas.microsoft.com/office/powerpoint/2010/main" xmlns:p15="http://schemas.microsoft.com/office/powerpoint/2012/main" Requires="p14">
+    <mc:Choice xmlns:p15="http://schemas.microsoft.com/office/powerpoint/2012/main" xmlns:p14="http://schemas.microsoft.com/office/powerpoint/2010/main" xmlns="" Requires="p14">
       <p:transition spd="slow" p14:dur="2000"/>
     </mc:Choice>
     <mc:Fallback>
@@ -7066,7 +6939,7 @@
     <a:masterClrMapping/>
   </p:clrMapOvr>
   <mc:AlternateContent xmlns:mc="http://schemas.openxmlformats.org/markup-compatibility/2006">
-    <mc:Choice xmlns="" xmlns:p14="http://schemas.microsoft.com/office/powerpoint/2010/main" xmlns:p15="http://schemas.microsoft.com/office/powerpoint/2012/main" Requires="p14">
+    <mc:Choice xmlns:p15="http://schemas.microsoft.com/office/powerpoint/2012/main" xmlns:p14="http://schemas.microsoft.com/office/powerpoint/2010/main" xmlns="" Requires="p14">
       <p:transition spd="slow" p14:dur="2000"/>
     </mc:Choice>
     <mc:Fallback>
@@ -7617,7 +7490,7 @@
     <a:masterClrMapping/>
   </p:clrMapOvr>
   <mc:AlternateContent xmlns:mc="http://schemas.openxmlformats.org/markup-compatibility/2006">
-    <mc:Choice xmlns="" xmlns:p14="http://schemas.microsoft.com/office/powerpoint/2010/main" xmlns:p15="http://schemas.microsoft.com/office/powerpoint/2012/main" Requires="p14">
+    <mc:Choice xmlns:p15="http://schemas.microsoft.com/office/powerpoint/2012/main" xmlns:p14="http://schemas.microsoft.com/office/powerpoint/2010/main" xmlns="" Requires="p14">
       <p:transition spd="slow" p14:dur="2000"/>
     </mc:Choice>
     <mc:Fallback>
@@ -7957,17 +7830,8 @@
               <a:rPr lang="en-US" sz="2200" dirty="0" smtClean="0">
                 <a:latin typeface="Source Sans Pro"/>
               </a:rPr>
-              <a:t>: Merge data into unified knowledge </a:t>
-            </a:r>
-            <a:r>
-              <a:rPr lang="en-US" sz="2200" dirty="0" smtClean="0">
-                <a:latin typeface="Source Sans Pro"/>
-              </a:rPr>
-              <a:t>base</a:t>
-            </a:r>
-            <a:endParaRPr lang="en-US" sz="2200" dirty="0" smtClean="0">
-              <a:latin typeface="Source Sans Pro"/>
-            </a:endParaRPr>
+              <a:t>: Merge data into unified knowledge base</a:t>
+            </a:r>
           </a:p>
         </p:txBody>
       </p:sp>
@@ -7977,7 +7841,7 @@
     <a:masterClrMapping/>
   </p:clrMapOvr>
   <mc:AlternateContent xmlns:mc="http://schemas.openxmlformats.org/markup-compatibility/2006">
-    <mc:Choice xmlns="" xmlns:p14="http://schemas.microsoft.com/office/powerpoint/2010/main" xmlns:p15="http://schemas.microsoft.com/office/powerpoint/2012/main" Requires="p14">
+    <mc:Choice xmlns:p15="http://schemas.microsoft.com/office/powerpoint/2012/main" xmlns:p14="http://schemas.microsoft.com/office/powerpoint/2010/main" xmlns="" Requires="p14">
       <p:transition spd="slow" p14:dur="2000"/>
     </mc:Choice>
     <mc:Fallback>
@@ -8273,17 +8137,8 @@
               <a:rPr lang="en-US" sz="2200" dirty="0" smtClean="0">
                 <a:latin typeface="Source Sans Pro"/>
               </a:rPr>
-              <a:t>Access control and data privacy </a:t>
-            </a:r>
-            <a:r>
-              <a:rPr lang="en-US" sz="2200" dirty="0" smtClean="0">
-                <a:latin typeface="Source Sans Pro"/>
-              </a:rPr>
-              <a:t>mechanisms</a:t>
-            </a:r>
-            <a:endParaRPr lang="en-US" sz="2200" dirty="0" smtClean="0">
-              <a:latin typeface="Source Sans Pro"/>
-            </a:endParaRPr>
+              <a:t>Access control and data privacy mechanisms</a:t>
+            </a:r>
           </a:p>
         </p:txBody>
       </p:sp>
@@ -8293,7 +8148,7 @@
     <a:masterClrMapping/>
   </p:clrMapOvr>
   <mc:AlternateContent xmlns:mc="http://schemas.openxmlformats.org/markup-compatibility/2006">
-    <mc:Choice xmlns="" xmlns:p14="http://schemas.microsoft.com/office/powerpoint/2010/main" xmlns:p15="http://schemas.microsoft.com/office/powerpoint/2012/main" Requires="p14">
+    <mc:Choice xmlns:p15="http://schemas.microsoft.com/office/powerpoint/2012/main" xmlns:p14="http://schemas.microsoft.com/office/powerpoint/2010/main" xmlns="" Requires="p14">
       <p:transition spd="slow" p14:dur="2000"/>
     </mc:Choice>
     <mc:Fallback>
@@ -8673,7 +8528,7 @@
     <a:masterClrMapping/>
   </p:clrMapOvr>
   <mc:AlternateContent xmlns:mc="http://schemas.openxmlformats.org/markup-compatibility/2006">
-    <mc:Choice xmlns="" xmlns:p14="http://schemas.microsoft.com/office/powerpoint/2010/main" xmlns:p15="http://schemas.microsoft.com/office/powerpoint/2012/main" Requires="p14">
+    <mc:Choice xmlns:p15="http://schemas.microsoft.com/office/powerpoint/2012/main" xmlns:p14="http://schemas.microsoft.com/office/powerpoint/2010/main" xmlns="" Requires="p14">
       <p:transition spd="slow" p14:dur="2000"/>
     </mc:Choice>
     <mc:Fallback>
@@ -9029,7 +8884,7 @@
     <a:masterClrMapping/>
   </p:clrMapOvr>
   <mc:AlternateContent xmlns:mc="http://schemas.openxmlformats.org/markup-compatibility/2006">
-    <mc:Choice xmlns="" xmlns:p14="http://schemas.microsoft.com/office/powerpoint/2010/main" xmlns:p15="http://schemas.microsoft.com/office/powerpoint/2012/main" Requires="p14">
+    <mc:Choice xmlns:p15="http://schemas.microsoft.com/office/powerpoint/2012/main" xmlns:p14="http://schemas.microsoft.com/office/powerpoint/2010/main" xmlns="" Requires="p14">
       <p:transition spd="slow" p14:dur="2000"/>
     </mc:Choice>
     <mc:Fallback>

--- a/presentaion1.pptx
+++ b/presentaion1.pptx
@@ -5354,7 +5354,7 @@
     <a:masterClrMapping/>
   </p:clrMapOvr>
   <mc:AlternateContent xmlns:mc="http://schemas.openxmlformats.org/markup-compatibility/2006">
-    <mc:Choice xmlns:p15="http://schemas.microsoft.com/office/powerpoint/2012/main" xmlns:p14="http://schemas.microsoft.com/office/powerpoint/2010/main" xmlns="" Requires="p14">
+    <mc:Choice xmlns="" xmlns:p14="http://schemas.microsoft.com/office/powerpoint/2010/main" xmlns:p15="http://schemas.microsoft.com/office/powerpoint/2012/main" Requires="p14">
       <p:transition spd="slow" p14:dur="2000"/>
     </mc:Choice>
     <mc:Fallback>
@@ -5980,7 +5980,7 @@
     <a:masterClrMapping/>
   </p:clrMapOvr>
   <mc:AlternateContent xmlns:mc="http://schemas.openxmlformats.org/markup-compatibility/2006">
-    <mc:Choice xmlns:p15="http://schemas.microsoft.com/office/powerpoint/2012/main" xmlns:p14="http://schemas.microsoft.com/office/powerpoint/2010/main" xmlns="" Requires="p14">
+    <mc:Choice xmlns="" xmlns:p14="http://schemas.microsoft.com/office/powerpoint/2010/main" xmlns:p15="http://schemas.microsoft.com/office/powerpoint/2012/main" Requires="p14">
       <p:transition spd="slow" p14:dur="2000"/>
     </mc:Choice>
     <mc:Fallback>
@@ -6434,7 +6434,7 @@
     <a:masterClrMapping/>
   </p:clrMapOvr>
   <mc:AlternateContent xmlns:mc="http://schemas.openxmlformats.org/markup-compatibility/2006">
-    <mc:Choice xmlns:p15="http://schemas.microsoft.com/office/powerpoint/2012/main" xmlns:p14="http://schemas.microsoft.com/office/powerpoint/2010/main" xmlns="" Requires="p14">
+    <mc:Choice xmlns="" xmlns:p14="http://schemas.microsoft.com/office/powerpoint/2010/main" xmlns:p15="http://schemas.microsoft.com/office/powerpoint/2012/main" Requires="p14">
       <p:transition spd="slow" p14:dur="2000"/>
     </mc:Choice>
     <mc:Fallback>
@@ -6939,7 +6939,7 @@
     <a:masterClrMapping/>
   </p:clrMapOvr>
   <mc:AlternateContent xmlns:mc="http://schemas.openxmlformats.org/markup-compatibility/2006">
-    <mc:Choice xmlns:p15="http://schemas.microsoft.com/office/powerpoint/2012/main" xmlns:p14="http://schemas.microsoft.com/office/powerpoint/2010/main" xmlns="" Requires="p14">
+    <mc:Choice xmlns="" xmlns:p14="http://schemas.microsoft.com/office/powerpoint/2010/main" xmlns:p15="http://schemas.microsoft.com/office/powerpoint/2012/main" Requires="p14">
       <p:transition spd="slow" p14:dur="2000"/>
     </mc:Choice>
     <mc:Fallback>
@@ -7490,7 +7490,7 @@
     <a:masterClrMapping/>
   </p:clrMapOvr>
   <mc:AlternateContent xmlns:mc="http://schemas.openxmlformats.org/markup-compatibility/2006">
-    <mc:Choice xmlns:p15="http://schemas.microsoft.com/office/powerpoint/2012/main" xmlns:p14="http://schemas.microsoft.com/office/powerpoint/2010/main" xmlns="" Requires="p14">
+    <mc:Choice xmlns="" xmlns:p14="http://schemas.microsoft.com/office/powerpoint/2010/main" xmlns:p15="http://schemas.microsoft.com/office/powerpoint/2012/main" Requires="p14">
       <p:transition spd="slow" p14:dur="2000"/>
     </mc:Choice>
     <mc:Fallback>
@@ -7841,7 +7841,7 @@
     <a:masterClrMapping/>
   </p:clrMapOvr>
   <mc:AlternateContent xmlns:mc="http://schemas.openxmlformats.org/markup-compatibility/2006">
-    <mc:Choice xmlns:p15="http://schemas.microsoft.com/office/powerpoint/2012/main" xmlns:p14="http://schemas.microsoft.com/office/powerpoint/2010/main" xmlns="" Requires="p14">
+    <mc:Choice xmlns="" xmlns:p14="http://schemas.microsoft.com/office/powerpoint/2010/main" xmlns:p15="http://schemas.microsoft.com/office/powerpoint/2012/main" Requires="p14">
       <p:transition spd="slow" p14:dur="2000"/>
     </mc:Choice>
     <mc:Fallback>
@@ -8148,7 +8148,7 @@
     <a:masterClrMapping/>
   </p:clrMapOvr>
   <mc:AlternateContent xmlns:mc="http://schemas.openxmlformats.org/markup-compatibility/2006">
-    <mc:Choice xmlns:p15="http://schemas.microsoft.com/office/powerpoint/2012/main" xmlns:p14="http://schemas.microsoft.com/office/powerpoint/2010/main" xmlns="" Requires="p14">
+    <mc:Choice xmlns="" xmlns:p14="http://schemas.microsoft.com/office/powerpoint/2010/main" xmlns:p15="http://schemas.microsoft.com/office/powerpoint/2012/main" Requires="p14">
       <p:transition spd="slow" p14:dur="2000"/>
     </mc:Choice>
     <mc:Fallback>
@@ -8528,7 +8528,7 @@
     <a:masterClrMapping/>
   </p:clrMapOvr>
   <mc:AlternateContent xmlns:mc="http://schemas.openxmlformats.org/markup-compatibility/2006">
-    <mc:Choice xmlns:p15="http://schemas.microsoft.com/office/powerpoint/2012/main" xmlns:p14="http://schemas.microsoft.com/office/powerpoint/2010/main" xmlns="" Requires="p14">
+    <mc:Choice xmlns="" xmlns:p14="http://schemas.microsoft.com/office/powerpoint/2010/main" xmlns:p15="http://schemas.microsoft.com/office/powerpoint/2012/main" Requires="p14">
       <p:transition spd="slow" p14:dur="2000"/>
     </mc:Choice>
     <mc:Fallback>
@@ -8884,7 +8884,7 @@
     <a:masterClrMapping/>
   </p:clrMapOvr>
   <mc:AlternateContent xmlns:mc="http://schemas.openxmlformats.org/markup-compatibility/2006">
-    <mc:Choice xmlns:p15="http://schemas.microsoft.com/office/powerpoint/2012/main" xmlns:p14="http://schemas.microsoft.com/office/powerpoint/2010/main" xmlns="" Requires="p14">
+    <mc:Choice xmlns="" xmlns:p14="http://schemas.microsoft.com/office/powerpoint/2010/main" xmlns:p15="http://schemas.microsoft.com/office/powerpoint/2012/main" Requires="p14">
       <p:transition spd="slow" p14:dur="2000"/>
     </mc:Choice>
     <mc:Fallback>
